--- a/docs-src/slides/conteudoDadosDigitaisCont.pptx
+++ b/docs-src/slides/conteudoDadosDigitaisCont.pptx
@@ -5037,8 +5037,8 @@
           </a:p>
         </p:txBody>
       </p:sp>
-      <mc:AlternateContent xmlns:mc="http://schemas.openxmlformats.org/markup-compatibility/2006">
-        <mc:Choice xmlns:a14="http://schemas.microsoft.com/office/drawing/2010/main" Requires="a14">
+      <mc:AlternateContent xmlns:mc="http://schemas.openxmlformats.org/markup-compatibility/2006" xmlns:a14="http://schemas.microsoft.com/office/drawing/2010/main">
+        <mc:Choice Requires="a14">
           <p:sp>
             <p:nvSpPr>
               <p:cNvPr id="16" name="TextBox 15">
@@ -5147,7 +5147,7 @@
             </p:txBody>
           </p:sp>
         </mc:Choice>
-        <mc:Fallback>
+        <mc:Fallback xmlns="">
           <p:sp>
             <p:nvSpPr>
               <p:cNvPr id="16" name="TextBox 15">
@@ -17705,8 +17705,8 @@
           </a:graphicData>
         </a:graphic>
       </p:graphicFrame>
-      <mc:AlternateContent xmlns:mc="http://schemas.openxmlformats.org/markup-compatibility/2006">
-        <mc:Choice xmlns:a14="http://schemas.microsoft.com/office/drawing/2010/main" Requires="a14">
+      <mc:AlternateContent xmlns:mc="http://schemas.openxmlformats.org/markup-compatibility/2006" xmlns:a14="http://schemas.microsoft.com/office/drawing/2010/main">
+        <mc:Choice Requires="a14">
           <p:sp>
             <p:nvSpPr>
               <p:cNvPr id="22" name="TextBox 21">
@@ -17735,6 +17735,7 @@
               </a:bodyPr>
               <a:lstStyle/>
               <a:p>
+                <a:pPr/>
                 <a14:m>
                   <m:oMathPara xmlns:m="http://schemas.openxmlformats.org/officeDocument/2006/math">
                     <m:oMathParaPr>
@@ -17780,11 +17781,12 @@
                     </m:oMath>
                   </m:oMathPara>
                 </a14:m>
+                <a:endParaRPr dirty="0"/>
               </a:p>
             </p:txBody>
           </p:sp>
         </mc:Choice>
-        <mc:Fallback>
+        <mc:Fallback xmlns="">
           <p:sp>
             <p:nvSpPr>
               <p:cNvPr id="22" name="TextBox 21">
@@ -19661,6 +19663,51 @@
                       </p:childTnLst>
                     </p:cTn>
                   </p:par>
+                  <p:par>
+                    <p:cTn id="136" fill="hold">
+                      <p:stCondLst>
+                        <p:cond delay="indefinite"/>
+                      </p:stCondLst>
+                      <p:childTnLst>
+                        <p:par>
+                          <p:cTn id="137" fill="hold">
+                            <p:stCondLst>
+                              <p:cond delay="0"/>
+                            </p:stCondLst>
+                            <p:childTnLst>
+                              <p:par>
+                                <p:cTn id="138" presetID="1" presetClass="entr" presetSubtype="0" fill="hold" grpId="0" nodeType="clickEffect">
+                                  <p:stCondLst>
+                                    <p:cond delay="0"/>
+                                  </p:stCondLst>
+                                  <p:childTnLst>
+                                    <p:set>
+                                      <p:cBhvr>
+                                        <p:cTn id="139" dur="1" fill="hold">
+                                          <p:stCondLst>
+                                            <p:cond delay="0"/>
+                                          </p:stCondLst>
+                                        </p:cTn>
+                                        <p:tgtEl>
+                                          <p:spTgt spid="22"/>
+                                        </p:tgtEl>
+                                        <p:attrNameLst>
+                                          <p:attrName>style.visibility</p:attrName>
+                                        </p:attrNameLst>
+                                      </p:cBhvr>
+                                      <p:to>
+                                        <p:strVal val="visible"/>
+                                      </p:to>
+                                    </p:set>
+                                  </p:childTnLst>
+                                </p:cTn>
+                              </p:par>
+                            </p:childTnLst>
+                          </p:cTn>
+                        </p:par>
+                      </p:childTnLst>
+                    </p:cTn>
+                  </p:par>
                 </p:childTnLst>
               </p:cTn>
               <p:prevCondLst>
@@ -19682,6 +19729,9 @@
         </p:cTn>
       </p:par>
     </p:tnLst>
+    <p:bldLst>
+      <p:bldP spid="22" grpId="0"/>
+    </p:bldLst>
   </p:timing>
 </p:sld>
 </file>
